--- a/report/DataX_round2_pitch_deck.pptx
+++ b/report/DataX_round2_pitch_deck.pptx
@@ -587,7 +587,7 @@
               <a:rPr sz="1100">
                 <a:latin typeface="Calibri"/>
               </a:rPr>
-              <a:t>Five numbers to take away. Twenty-eight-point-six million rupees of net value from the cooler programme. Two hundred outlets we can save before they go dormant. The first per-outlet trade-spend split this organisation has ever had. A two-standard-deviation gap between our best and worst distributor — already actionable. And every recommendation in the system is traceable, both to its data driver and to its alternative scenario. Questions.
+              <a:t>Five numbers to take away. Thirty-one-point-six-five million rupees of net value from the cooler programme. Two hundred outlets we can save before they go dormant. The first per-outlet trade-spend split this organisation has ever had. A two-standard-deviation gap between our best and worst distributor — already actionable. And every recommendation in the system is traceable, both to its data driver and to its alternative scenario. Questions.
 --- BACKUP TALKING POINTS FOR Q&amp;A ---
 [LIMITATIONS] β (litres-per-LKR elasticity) is uncalibrated — published as a sensitivity sweep, not a point estimate. Counterfactuals are model-predicted, not empirically validated (dataset has no cooler-install dates). Channel-split weights come from marketing-mix-modelling literature, not from data — the pilot programme calibrates these. OSM POI coverage is patchier in rural districts; within-province tier normalisation mitigates but does not eliminate the bias.
 [WHY NO ML] A supervised learner trained on V reproduces V in expectation — including its censoring. Tobit (Tobin 1958) and SFA (Aigner et al 1977) explicitly model D ≥ V when the constraint binds — which is the problem. Five independent textbook estimators converging on the same ranking is stronger evidence than one tuned ML model.
@@ -1030,7 +1030,7 @@
               <a:rPr sz="1100">
                 <a:latin typeface="Calibri"/>
               </a:rPr>
-              <a:t>If leadership took one decision from this submission, it should be this one. Of the seven thousand outlets without a cooler today, our model identifies one hundred that pay back the cooler in under four months on average and generate twenty-eight-point-six million rupees of net margin in two years — almost six times the capital deployed. The full ranked list is inside the web app.</a:t>
+              <a:t>If leadership took one decision from this submission, it should be this one. Of the outlets without a cooler today, our model identifies one hundred that pay back the cooler in under three-and-a-half months on average and generate thirty-one-point-six-five million rupees of net margin in two years — more than six times the capital deployed. The full ranked list is inside the web app.</a:t>
             </a:r>
           </a:p>
         </p:txBody>
@@ -1103,7 +1103,7 @@
               <a:rPr sz="1100">
                 <a:latin typeface="Calibri"/>
               </a:rPr>
-              <a:t>[Switch to live web app at localhost:3000.] Dashboard — total predicted potential six-point-three-five million litres, LKR 5 M allocated. [Click Outlets, filter Western + Grocery + Medium.] Twelve hundred outlets. [Click any high-potential outlet.] Drill-down. Top reasons. Click 'Explain this outlet.' Gemini returns two paragraphs and three actions. [Switch to Insights.] Cooler ROI, dormancy, scorecard, territories on a map. Five minutes total.</a:t>
+              <a:t>[Switch to live web app at localhost:3000.] Dashboard — total predicted potential six-point-six million litres, LKR 5 M allocated. [Click Outlets, filter Western + Grocery + Medium.] Twelve hundred outlets. [Click any high-potential outlet.] Drill-down. Top reasons. Click 'Explain this outlet.' Gemini returns two paragraphs and three actions. [Switch to Insights.] Cooler ROI, dormancy, scorecard, territories on a map. Five minutes total.</a:t>
             </a:r>
           </a:p>
         </p:txBody>
@@ -4610,7 +4610,7 @@
                 </a:solidFill>
                 <a:latin typeface="Calibri"/>
               </a:rPr>
-              <a:t>0.794</a:t>
+              <a:t>0.793</a:t>
             </a:r>
           </a:p>
         </p:txBody>
@@ -4727,7 +4727,7 @@
                 </a:solidFill>
                 <a:latin typeface="Calibri"/>
               </a:rPr>
-              <a:t>4,999,956</a:t>
+              <a:t>4,999,913</a:t>
             </a:r>
           </a:p>
         </p:txBody>
@@ -4844,7 +4844,7 @@
                 </a:solidFill>
                 <a:latin typeface="Calibri"/>
               </a:rPr>
-              <a:t>LKR 28.6 M</a:t>
+              <a:t>LKR 31.65 M</a:t>
             </a:r>
           </a:p>
         </p:txBody>
@@ -5252,7 +5252,7 @@
                 </a:solidFill>
                 <a:latin typeface="Calibri"/>
               </a:rPr>
-              <a:t>LKR 28.6 M net 24-month value from a LKR 5 M cooler programme</a:t>
+              <a:t>LKR 31.65 M net 24-month value from a LKR 5 M cooler programme</a:t>
             </a:r>
           </a:p>
         </p:txBody>
@@ -5564,7 +5564,7 @@
                 </a:solidFill>
                 <a:latin typeface="Calibri"/>
               </a:rPr>
-              <a:t>First per-outlet split of trade spend (35 / 42 / 23)</a:t>
+              <a:t>First per-outlet split of trade spend (34.9 / 41.8 / 23.3)</a:t>
             </a:r>
           </a:p>
         </p:txBody>
@@ -10129,7 +10129,7 @@
                 </a:solidFill>
                 <a:latin typeface="Calibri"/>
               </a:rPr>
-              <a:t>0.794</a:t>
+              <a:t>0.793</a:t>
             </a:r>
           </a:p>
         </p:txBody>
@@ -10164,7 +10164,7 @@
                 </a:solidFill>
                 <a:latin typeface="Calibri"/>
               </a:rPr>
-              <a:t>over 11,256 evaluable outlets</a:t>
+              <a:t>over 10,949 evaluable outlets</a:t>
             </a:r>
           </a:p>
         </p:txBody>
@@ -11374,7 +11374,7 @@
                 </a:solidFill>
                 <a:latin typeface="Calibri"/>
               </a:rPr>
-              <a:t>share of LKR 5 M  ·  35 %</a:t>
+              <a:t>share of LKR 5 M  ·  34.9 %</a:t>
             </a:r>
           </a:p>
         </p:txBody>
@@ -11573,7 +11573,7 @@
                 </a:solidFill>
                 <a:latin typeface="Calibri"/>
               </a:rPr>
-              <a:t>LKR 2.10 M</a:t>
+              <a:t>LKR 2.09 M</a:t>
             </a:r>
           </a:p>
         </p:txBody>
@@ -11608,7 +11608,7 @@
                 </a:solidFill>
                 <a:latin typeface="Calibri"/>
               </a:rPr>
-              <a:t>share of LKR 5 M  ·  42 %</a:t>
+              <a:t>share of LKR 5 M  ·  41.8 %</a:t>
             </a:r>
           </a:p>
         </p:txBody>
@@ -11807,7 +11807,7 @@
                 </a:solidFill>
                 <a:latin typeface="Calibri"/>
               </a:rPr>
-              <a:t>LKR 1.16 M</a:t>
+              <a:t>LKR 1.17 M</a:t>
             </a:r>
           </a:p>
         </p:txBody>
@@ -11842,7 +11842,7 @@
                 </a:solidFill>
                 <a:latin typeface="Calibri"/>
               </a:rPr>
-              <a:t>share of LKR 5 M  ·  23 %</a:t>
+              <a:t>share of LKR 5 M  ·  23.3 %</a:t>
             </a:r>
           </a:p>
         </p:txBody>
@@ -11920,7 +11920,7 @@
                 </a:solidFill>
                 <a:latin typeface="Calibri"/>
               </a:rPr>
-              <a:t>LKR 4,999,955.90 allocated across 8,803 funded outlets (186 zero-uplift outlets correctly excluded).</a:t>
+              <a:t>LKR 4,999,912.87 allocated across 8,416 funded outlets (172 zero-uplift outlets correctly excluded).</a:t>
             </a:r>
           </a:p>
         </p:txBody>
@@ -12242,7 +12242,7 @@
                 </a:solidFill>
                 <a:latin typeface="Calibri"/>
               </a:rPr>
-              <a:t>LKR 28.6 M</a:t>
+              <a:t>LKR 31.65 M</a:t>
             </a:r>
           </a:p>
         </p:txBody>
@@ -12277,7 +12277,7 @@
                 </a:solidFill>
                 <a:latin typeface="Calibri"/>
               </a:rPr>
-              <a:t>from a LKR 5 M cooler programme  ·  median payback 3.6 months</a:t>
+              <a:t>from a LKR 5 M cooler programme  ·  median payback 3.33 months</a:t>
             </a:r>
           </a:p>
         </p:txBody>
@@ -12437,7 +12437,7 @@
                           </a:solidFill>
                           <a:latin typeface="Calibri"/>
                         </a:rPr>
-                        <a:t>LKR 33,629,125</a:t>
+                        <a:t>LKR 36,650,325</a:t>
                       </a:r>
                     </a:p>
                   </a:txBody>
@@ -12485,7 +12485,7 @@
                           </a:solidFill>
                           <a:latin typeface="Calibri"/>
                         </a:rPr>
-                        <a:t>LKR 28,629,125</a:t>
+                        <a:t>LKR 31,650,325</a:t>
                       </a:r>
                     </a:p>
                   </a:txBody>
@@ -12533,7 +12533,7 @@
                           </a:solidFill>
                           <a:latin typeface="Calibri"/>
                         </a:rPr>
-                        <a:t>3.6 months</a:t>
+                        <a:t>3.33 months</a:t>
                       </a:r>
                     </a:p>
                   </a:txBody>
@@ -12581,7 +12581,7 @@
                           </a:solidFill>
                           <a:latin typeface="Calibri"/>
                         </a:rPr>
-                        <a:t>7,028</a:t>
+                        <a:t>~6,500</a:t>
                       </a:r>
                     </a:p>
                   </a:txBody>
